--- a/03 pnpcontrols.pptx
+++ b/03 pnpcontrols.pptx
@@ -264,7 +264,7 @@
               <a:rPr lang="en-US" smtClean="0">
                 <a:latin typeface="Segoe UI" pitchFamily="34" charset="0"/>
               </a:rPr>
-              <a:t>11/9/2022 1:07 PM</a:t>
+              <a:t>5/25/26 7:01 AM</a:t>
             </a:fld>
             <a:endParaRPr lang="en-US" dirty="0">
               <a:latin typeface="Segoe UI" pitchFamily="34" charset="0"/>
@@ -561,7 +561,7 @@
           <a:p>
             <a:fld id="{D18B56EA-E28F-4F92-9F16-7A6F2501B303}" type="datetime8">
               <a:rPr lang="en-US" smtClean="0"/>
-              <a:t>11/9/2022 1:07 PM</a:t>
+              <a:t>5/25/26 6:59 AM</a:t>
             </a:fld>
             <a:endParaRPr lang="en-US" dirty="0"/>
           </a:p>
@@ -944,7 +944,7 @@
           <a:p>
             <a:fld id="{D18B56EA-E28F-4F92-9F16-7A6F2501B303}" type="datetime8">
               <a:rPr lang="en-US" smtClean="0"/>
-              <a:t>11/9/2022 1:07 PM</a:t>
+              <a:t>5/25/26 6:59 AM</a:t>
             </a:fld>
             <a:endParaRPr lang="en-US" dirty="0"/>
           </a:p>
@@ -1125,7 +1125,7 @@
           <a:p>
             <a:fld id="{D18B56EA-E28F-4F92-9F16-7A6F2501B303}" type="datetime8">
               <a:rPr lang="en-US" smtClean="0"/>
-              <a:t>11/9/2022 1:07 PM</a:t>
+              <a:t>5/25/26 6:59 AM</a:t>
             </a:fld>
             <a:endParaRPr lang="en-US" dirty="0"/>
           </a:p>
@@ -1361,7 +1361,7 @@
           <a:p>
             <a:fld id="{D18B56EA-E28F-4F92-9F16-7A6F2501B303}" type="datetime8">
               <a:rPr lang="en-US" smtClean="0"/>
-              <a:t>11/9/2022 1:07 PM</a:t>
+              <a:t>5/25/26 6:59 AM</a:t>
             </a:fld>
             <a:endParaRPr lang="en-US" dirty="0"/>
           </a:p>
@@ -1786,7 +1786,7 @@
           <a:p>
             <a:fld id="{D18B56EA-E28F-4F92-9F16-7A6F2501B303}" type="datetime8">
               <a:rPr lang="en-US" smtClean="0"/>
-              <a:t>11/9/2022 1:07 PM</a:t>
+              <a:t>5/25/26 6:59 AM</a:t>
             </a:fld>
             <a:endParaRPr lang="en-US" dirty="0"/>
           </a:p>
@@ -2036,7 +2036,7 @@
           <a:p>
             <a:fld id="{D18B56EA-E28F-4F92-9F16-7A6F2501B303}" type="datetime8">
               <a:rPr lang="en-US" smtClean="0"/>
-              <a:t>11/9/2022 1:07 PM</a:t>
+              <a:t>5/25/26 6:59 AM</a:t>
             </a:fld>
             <a:endParaRPr lang="en-US" dirty="0"/>
           </a:p>
@@ -2276,7 +2276,7 @@
           <a:p>
             <a:fld id="{D18B56EA-E28F-4F92-9F16-7A6F2501B303}" type="datetime8">
               <a:rPr lang="en-US" smtClean="0"/>
-              <a:t>11/9/2022 1:07 PM</a:t>
+              <a:t>5/25/26 6:59 AM</a:t>
             </a:fld>
             <a:endParaRPr lang="en-US" dirty="0"/>
           </a:p>
@@ -2457,7 +2457,7 @@
           <a:p>
             <a:fld id="{D18B56EA-E28F-4F92-9F16-7A6F2501B303}" type="datetime8">
               <a:rPr lang="en-US" smtClean="0"/>
-              <a:t>11/9/2022 1:07 PM</a:t>
+              <a:t>5/25/26 6:59 AM</a:t>
             </a:fld>
             <a:endParaRPr lang="en-US" dirty="0"/>
           </a:p>
@@ -2638,7 +2638,7 @@
           <a:p>
             <a:fld id="{D18B56EA-E28F-4F92-9F16-7A6F2501B303}" type="datetime8">
               <a:rPr lang="en-US" smtClean="0"/>
-              <a:t>11/9/2022 1:07 PM</a:t>
+              <a:t>5/25/26 6:59 AM</a:t>
             </a:fld>
             <a:endParaRPr lang="en-US" dirty="0"/>
           </a:p>
@@ -2819,7 +2819,7 @@
           <a:p>
             <a:fld id="{D18B56EA-E28F-4F92-9F16-7A6F2501B303}" type="datetime8">
               <a:rPr lang="en-US" smtClean="0"/>
-              <a:t>11/9/2022 1:07 PM</a:t>
+              <a:t>5/25/26 6:59 AM</a:t>
             </a:fld>
             <a:endParaRPr lang="en-US" dirty="0"/>
           </a:p>
@@ -16132,14 +16132,19 @@
             <p:ph type="body" sz="quarter" idx="10"/>
           </p:nvPr>
         </p:nvSpPr>
-        <p:spPr/>
+        <p:spPr>
+          <a:xfrm>
+            <a:off x="464400" y="1212850"/>
+            <a:ext cx="11574000" cy="3287054"/>
+          </a:xfrm>
+        </p:spPr>
         <p:txBody>
           <a:bodyPr/>
           <a:lstStyle/>
           <a:p>
             <a:r>
               <a:rPr lang="en-US" dirty="0"/>
-              <a:t>Open source community library</a:t>
+              <a:t>Open-source community library</a:t>
             </a:r>
           </a:p>
           <a:p>
